--- a/docs/Prowess_Deployment_Strategy.pptx
+++ b/docs/Prowess_Deployment_Strategy.pptx
@@ -2975,7 +2975,7 @@
                 <a:ea typeface="Cambria" pitchFamily="34" charset="-122"/>
                 <a:cs typeface="Cambria" pitchFamily="34" charset="-120"/>
               </a:rPr>
-              <a:t>Three of four envs live. Only Prod deferred until Supabase Pro.</a:t>
+              <a:t>Three of four envs live. Automated DB pushes wired. Only Prod deferred.</a:t>
             </a:r>
             <a:endParaRPr lang="en-US" sz="3200" dirty="0"/>
           </a:p>
@@ -3442,7 +3442,7 @@
                 <a:ea typeface="Calibri" pitchFamily="34" charset="-122"/>
                 <a:cs typeface="Calibri" pitchFamily="34" charset="-120"/>
               </a:rPr>
-              <a:t>Live — dev.prowessapp.net, refreshed to current Prod schema 2026-07-08</a:t>
+              <a:t>Live — dev.prowessapp.net. Auto DB push on merge to main + approval.</a:t>
             </a:r>
             <a:endParaRPr lang="en-US" sz="1200" dirty="0"/>
           </a:p>
@@ -3499,7 +3499,7 @@
                 <a:ea typeface="Calibri" pitchFamily="34" charset="-122"/>
                 <a:cs typeface="Calibri" pitchFamily="34" charset="-120"/>
               </a:rPr>
-              <a:t>Default env for feature work. Push migrations here first</a:t>
+              <a:t>Default env for feature work. Migrations flow automatically via workflow.</a:t>
             </a:r>
             <a:endParaRPr lang="en-US" sz="1200" dirty="0"/>
           </a:p>
@@ -3704,7 +3704,7 @@
                 <a:ea typeface="Calibri" pitchFamily="34" charset="-122"/>
                 <a:cs typeface="Calibri" pitchFamily="34" charset="-120"/>
               </a:rPr>
-              <a:t>Live — uat.prowessapp.net, prowess-uat (renamed from HRAPP), staging branch</a:t>
+              <a:t>Live — uat.prowessapp.net. Auto DB push on push to staging + approval.</a:t>
             </a:r>
             <a:endParaRPr lang="en-US" sz="1200" dirty="0"/>
           </a:p>
@@ -5305,7 +5305,7 @@
                 <a:ea typeface="Cambria" pitchFamily="34" charset="-122"/>
                 <a:cs typeface="Cambria" pitchFamily="34" charset="-120"/>
               </a:rPr>
-              <a:t>Add CI automation (optional)</a:t>
+              <a:t>CI automation via GitHub Actions</a:t>
             </a:r>
             <a:endParaRPr lang="en-US" sz="1500" dirty="0"/>
           </a:p>
@@ -5344,7 +5344,7 @@
                 <a:ea typeface="Calibri" pitchFamily="34" charset="-122"/>
                 <a:cs typeface="Calibri" pitchFamily="34" charset="-120"/>
               </a:rPr>
-              <a:t>GitHub Actions to run supabase db push per env on merge, with approval gate before Prod. Nice-to-have — manual promotion is fine to start.</a:t>
+              <a:t>Live. Workflow db-push.yml auto-applies migrations per env when branch is pushed. All three envs gated by required-reviewer approval.</a:t>
             </a:r>
             <a:endParaRPr lang="en-US" sz="1100" dirty="0"/>
           </a:p>
@@ -5405,7 +5405,7 @@
                 <a:ea typeface="Calibri" pitchFamily="34" charset="-122"/>
                 <a:cs typeface="Calibri" pitchFamily="34" charset="-120"/>
               </a:rPr>
-              <a:t>later</a:t>
+              <a:t>Done</a:t>
             </a:r>
             <a:endParaRPr lang="en-US" sz="1100" dirty="0"/>
           </a:p>
@@ -12334,7 +12334,7 @@
                 <a:ea typeface="Cambria" pitchFamily="34" charset="-122"/>
                 <a:cs typeface="Cambria" pitchFamily="34" charset="-120"/>
               </a:rPr>
-              <a:t>Migrations move separately. Human review at every gate.</a:t>
+              <a:t>GitHub Actions applies migrations. Human approval gates every env.</a:t>
             </a:r>
             <a:endParaRPr lang="en-US" sz="3200" dirty="0"/>
           </a:p>
@@ -12541,7 +12541,7 @@
                 <a:ea typeface="Courier New" pitchFamily="34" charset="-122"/>
                 <a:cs typeface="Courier New" pitchFamily="34" charset="-120"/>
               </a:rPr>
-              <a:t>supabase db push \</a:t>
+              <a:t>git push origin main</a:t>
             </a:r>
             <a:endParaRPr lang="en-US" sz="1100" dirty="0"/>
           </a:p>
@@ -12558,7 +12558,7 @@
                 <a:ea typeface="Courier New" pitchFamily="34" charset="-122"/>
                 <a:cs typeface="Courier New" pitchFamily="34" charset="-120"/>
               </a:rPr>
-              <a:t>    --project-ref \</a:t>
+              <a:t>→ GitHub Actions triggers</a:t>
             </a:r>
             <a:endParaRPr lang="en-US" sz="1100" dirty="0"/>
           </a:p>
@@ -12575,7 +12575,7 @@
                 <a:ea typeface="Courier New" pitchFamily="34" charset="-122"/>
                 <a:cs typeface="Courier New" pitchFamily="34" charset="-120"/>
               </a:rPr>
-              <a:t>    etmnumptfadkynbsgszz</a:t>
+              <a:t>→ Approve in Actions tab</a:t>
             </a:r>
             <a:endParaRPr lang="en-US" sz="1100" dirty="0"/>
           </a:p>
@@ -12614,7 +12614,7 @@
                 <a:ea typeface="Calibri" pitchFamily="34" charset="-122"/>
                 <a:cs typeface="Calibri" pitchFamily="34" charset="-120"/>
               </a:rPr>
-              <a:t>Applied as soon as PR merges to main. Cheap to break.</a:t>
+              <a:t>Push to main auto-triggers workflow. Vijey approves once, migrations apply.</a:t>
             </a:r>
             <a:endParaRPr lang="en-US" sz="1200" dirty="0"/>
           </a:p>
@@ -12821,7 +12821,7 @@
                 <a:ea typeface="Courier New" pitchFamily="34" charset="-122"/>
                 <a:cs typeface="Courier New" pitchFamily="34" charset="-120"/>
               </a:rPr>
-              <a:t>supabase db push \</a:t>
+              <a:t>git push origin staging</a:t>
             </a:r>
             <a:endParaRPr lang="en-US" sz="1100" dirty="0"/>
           </a:p>
@@ -12838,7 +12838,7 @@
                 <a:ea typeface="Courier New" pitchFamily="34" charset="-122"/>
                 <a:cs typeface="Courier New" pitchFamily="34" charset="-120"/>
               </a:rPr>
-              <a:t>    --project-ref \</a:t>
+              <a:t>→ GitHub Actions triggers</a:t>
             </a:r>
             <a:endParaRPr lang="en-US" sz="1100" dirty="0"/>
           </a:p>
@@ -12855,7 +12855,7 @@
                 <a:ea typeface="Courier New" pitchFamily="34" charset="-122"/>
                 <a:cs typeface="Courier New" pitchFamily="34" charset="-120"/>
               </a:rPr>
-              <a:t>    okpnubnswpgybpzgwgtr</a:t>
+              <a:t>→ Approve in Actions tab</a:t>
             </a:r>
             <a:endParaRPr lang="en-US" sz="1100" dirty="0"/>
           </a:p>
@@ -12894,7 +12894,7 @@
                 <a:ea typeface="Calibri" pitchFamily="34" charset="-122"/>
                 <a:cs typeface="Calibri" pitchFamily="34" charset="-120"/>
               </a:rPr>
-              <a:t>Applied after Dev testing. Any HR user can validate.</a:t>
+              <a:t>Merge main → staging, push. Same approval flow. HR validates on UAT.</a:t>
             </a:r>
             <a:endParaRPr lang="en-US" sz="1200" dirty="0"/>
           </a:p>
@@ -13101,7 +13101,7 @@
                 <a:ea typeface="Courier New" pitchFamily="34" charset="-122"/>
                 <a:cs typeface="Courier New" pitchFamily="34" charset="-120"/>
               </a:rPr>
-              <a:t>supabase db push \</a:t>
+              <a:t>git push origin production</a:t>
             </a:r>
             <a:endParaRPr lang="en-US" sz="1100" dirty="0"/>
           </a:p>
@@ -13118,7 +13118,7 @@
                 <a:ea typeface="Courier New" pitchFamily="34" charset="-122"/>
                 <a:cs typeface="Courier New" pitchFamily="34" charset="-120"/>
               </a:rPr>
-              <a:t>    --project-ref \</a:t>
+              <a:t>→ GitHub Actions triggers</a:t>
             </a:r>
             <a:endParaRPr lang="en-US" sz="1100" dirty="0"/>
           </a:p>
@@ -13135,7 +13135,7 @@
                 <a:ea typeface="Courier New" pitchFamily="34" charset="-122"/>
                 <a:cs typeface="Courier New" pitchFamily="34" charset="-120"/>
               </a:rPr>
-              <a:t>    &lt;prod-ref&gt; (soon)</a:t>
+              <a:t>→ Approval REQUIRED</a:t>
             </a:r>
             <a:endParaRPr lang="en-US" sz="1100" dirty="0"/>
           </a:p>
@@ -13174,7 +13174,7 @@
                 <a:ea typeface="Calibri" pitchFamily="34" charset="-122"/>
                 <a:cs typeface="Calibri" pitchFamily="34" charset="-120"/>
               </a:rPr>
-              <a:t>After Pro upgrade + new project. Backup + maintenance window.</a:t>
+              <a:t>Same flow, mandatory approver. When Prod project exists (Pro upgrade).</a:t>
             </a:r>
             <a:endParaRPr lang="en-US" sz="1200" dirty="0"/>
           </a:p>
